--- a/p05/Defining-a-frame-components.pptx
+++ b/p05/Defining-a-frame-components.pptx
@@ -4680,7 +4680,7 @@
         <p:spPr/>
         <p:txBody>
           <a:bodyPr>
-            <a:normAutofit lnSpcReduction="10000"/>
+            <a:normAutofit fontScale="92500"/>
           </a:bodyPr>
           <a:lstStyle/>
           <a:p>
@@ -4780,15 +4780,7 @@
             </a:pPr>
             <a:r>
               <a:rPr lang="en-US" dirty="0"/>
-              <a:t>	</a:t>
-            </a:r>
-            <a:r>
-              <a:rPr lang="en-US" dirty="0" err="1"/>
-              <a:t>this.el.addEventListener</a:t>
-            </a:r>
-            <a:r>
-              <a:rPr lang="en-US" dirty="0"/>
-              <a:t>('click', </a:t>
+              <a:t>	this.e1.addEventListener('click', </a:t>
             </a:r>
             <a:r>
               <a:rPr lang="en-US" dirty="0" err="1"/>
